--- a/templates/samples/template_slate.pptx
+++ b/templates/samples/template_slate.pptx
@@ -1035,7 +1035,7 @@
     <p:bg>
       <p:bgPr>
         <a:solidFill>
-          <a:srgbClr val="2C3E50"/>
+          <a:srgbClr val="3D4F5F"/>
         </a:solidFill>
       </p:bgPr>
     </p:bg>
@@ -1419,8 +1419,8 @@
             <a:avLst/>
           </a:prstGeom>
           <a:solidFill>
-            <a:srgbClr val="2C3E50">
-              <a:alpha val="70000"/>
+            <a:srgbClr val="3D4F5F">
+              <a:alpha val="80000"/>
             </a:srgbClr>
           </a:solidFill>
           <a:ln/>
@@ -1453,7 +1453,7 @@
             <a:r>
               <a:rPr lang="en-US" sz="2800" b="1" dirty="0">
                 <a:solidFill>
-                  <a:srgbClr val="2C3E50"/>
+                  <a:srgbClr val="3D4F5F"/>
                 </a:solidFill>
                 <a:latin typeface="Arial" pitchFamily="34" charset="0"/>
                 <a:ea typeface="Arial" pitchFamily="34" charset="-122"/>
@@ -1743,7 +1743,7 @@
             <a:r>
               <a:rPr lang="en-US" sz="1600" dirty="0">
                 <a:solidFill>
-                  <a:srgbClr val="2C3E50"/>
+                  <a:srgbClr val="3D4F5F"/>
                 </a:solidFill>
                 <a:latin typeface="Arial" pitchFamily="34" charset="0"/>
                 <a:ea typeface="Arial" pitchFamily="34" charset="-122"/>
@@ -1817,7 +1817,7 @@
             <a:avLst/>
           </a:prstGeom>
           <a:solidFill>
-            <a:srgbClr val="2C3E50"/>
+            <a:srgbClr val="3D4F5F"/>
           </a:solidFill>
           <a:ln/>
         </p:spPr>
